--- a/docs/hub/estate/Faculty of Health and Education/Department of Education/Marketing/Jaskel/Education leaflet 1053 v3 USE THIS.pptx
+++ b/docs/hub/estate/Faculty of Health and Education/Department of Education/Marketing/Jaskel/Education leaflet 1053 v3 USE THIS.pptx
@@ -3486,7 +3486,7 @@
               </a:defRPr>
             </a:pPr>
             <a:r>
-              <a:t>• Education Studies (2 years!)</a:t>
+              <a:t>• Education Studies (3 years!)</a:t>
             </a:r>
           </a:p>
           <a:p>
@@ -3499,7 +3499,7 @@
               </a:defRPr>
             </a:pPr>
             <a:r>
-              <a:t>• Educational Mentorship (2 years!)</a:t>
+              <a:t>• Educational Mentorship (3 years!)</a:t>
             </a:r>
           </a:p>
           <a:p>
@@ -3512,7 +3512,7 @@
               </a:defRPr>
             </a:pPr>
             <a:r>
-              <a:t>• Intergenerational Learning (2 years!)</a:t>
+              <a:t>• Intergenerational Learning (3 years!)</a:t>
             </a:r>
           </a:p>
           <a:p>
